--- a/lectures/b10/ppt/b10-l09.pptx
+++ b/lectures/b10/ppt/b10-l09.pptx
@@ -8131,7 +8131,7 @@
                 <a:ea typeface="Malgun Gothic"/>
                 <a:cs typeface="Malgun Gothic"/>
               </a:rPr>
-              <a:t>: 수용성·신배출 약물(아미노글리코사이드, 바코마이신, DOAC, 메트포르민, 가바펜틴, 디곡신, 리튬) 용량 조정. eGFR 추정식의 한계(근육량, 급성 변화) — 급성 신손상에서는 추정이 과대평가될 수 있다. 투석 제거 여부(분자량·단백 결합·분포용적)를 고려해 투석 후 보충.</a:t>
+              <a:t>: 수용성·신배출 약물(아미노글리코사이드, 반코마이신, DOAC, 메트포르민, 가바펜틴, 디곡신, 리튬) 용량 조정. eGFR 추정식의 한계(근육량, 급성 변화) — 급성 신손상에서는 추정이 과대평가될 수 있다. 투석 제거 여부(분자량·단백 결합·분포용적)를 고려해 투석 후 보충.</a:t>
             </a:r>
           </a:p>
           <a:p>
@@ -8547,7 +8547,7 @@
                 <a:ea typeface="Malgun Gothic"/>
                 <a:cs typeface="Malgun Gothic"/>
               </a:rPr>
-              <a:t>치료적 약물 농도 감시(TDM)가 필요한 약: 바코마이신(AUC 기반), 아미노글리코사이드, 디곡신, 리튬, 페니토인(알부민 보정), 테오필린, 면역억제제, 일부 항암제·항생제.</a:t>
+              <a:t>치료적 약물 농도 감시(TDM)가 필요한 약: 반코마이신(AUC 기반), 아미노글리코사이드, 디곡신, 리튬, 페니토인(알부민 보정), 테오필린, 면역억제제, 일부 항암제·항생제.</a:t>
             </a:r>
           </a:p>
         </p:txBody>
